--- a/Project 1/presentation/Retail_Project_1_Presentation.pptx
+++ b/Project 1/presentation/Retail_Project_1_Presentation.pptx
@@ -4399,24 +4399,32 @@
               <a:buNone/>
             </a:pPr>
             <a:r>
-              <a:rPr sz="1300">
+              <a:rPr lang="en-US" sz="1300" dirty="0">
                 <a:solidFill>
                   <a:srgbClr val="1B1F24"/>
                 </a:solidFill>
               </a:rPr>
-              <a:t>yesgat-020529563157-us-east-2-an</a:t>
-            </a:r>
-          </a:p>
-          <a:p>
-            <a:pPr marL="0" indent="0">
-              <a:buNone/>
-            </a:pPr>
-            <a:r>
-              <a:rPr sz="1300">
+              <a:t>#############</a:t>
+            </a:r>
+            <a:r>
+              <a:rPr sz="1300" dirty="0">
                 <a:solidFill>
                   <a:srgbClr val="1B1F24"/>
                 </a:solidFill>
               </a:rPr>
+              <a:t>-us-east-2-an</a:t>
+            </a:r>
+          </a:p>
+          <a:p>
+            <a:pPr marL="0" indent="0">
+              <a:buNone/>
+            </a:pPr>
+            <a:r>
+              <a:rPr sz="1300" dirty="0">
+                <a:solidFill>
+                  <a:srgbClr val="1B1F24"/>
+                </a:solidFill>
+              </a:rPr>
               <a:t>3 raw CSVs • 68 rows</a:t>
             </a:r>
           </a:p>
@@ -4425,7 +4433,7 @@
               <a:buNone/>
             </a:pPr>
             <a:r>
-              <a:rPr sz="1300">
+              <a:rPr sz="1300" dirty="0">
                 <a:solidFill>
                   <a:srgbClr val="1B1F24"/>
                 </a:solidFill>
